--- a/examples/pm11_title_filename/title_filename_guide.pptx
+++ b/examples/pm11_title_filename/title_filename_guide.pptx
@@ -586,9 +586,7 @@
               <a:t>NOTE_CONTENT_FORMAT: 1.0</a:t>
             </a:r>
           </a:p>
-          <a:p>
-            <a:endParaRPr/>
-          </a:p>
+          <a:p/>
           <a:p>
             <a:r>
               <a:t>===BLOCK===</a:t>
@@ -599,9 +597,7 @@
               <a:t>{{BLOCK:IMAGE}}</a:t>
             </a:r>
           </a:p>
-          <a:p>
-            <a:endParaRPr/>
-          </a:p>
+          <a:p/>
           <a:p>
             <a:r>
               <a:t>export-image-mode: slide_with_rectpct</a:t>
@@ -617,45 +613,34 @@
               <a:t>export-image: extracted/figures/&lt;__BASEFILENAME__&gt;_slide&lt;__SLIDENUM__&gt;_fig.png</a:t>
             </a:r>
           </a:p>
-          <a:p>
-            <a:endParaRPr lang="en-US"/>
-          </a:p>
-          <a:p>
-            <a:r>
-              <a:rPr lang="en-US"/>
+          <a:p/>
+          <a:p>
+            <a:r>
               <a:t>===BLOCK===</a:t>
             </a:r>
           </a:p>
           <a:p>
             <a:r>
-              <a:rPr lang="en-US"/>
               <a:t>{{BLOCK:IMAGE}}</a:t>
             </a:r>
           </a:p>
-          <a:p>
-            <a:endParaRPr lang="en-US"/>
-          </a:p>
-          <a:p>
-            <a:r>
-              <a:rPr lang="en-US"/>
+          <a:p/>
+          <a:p>
+            <a:r>
               <a:t>export-image-mode: slide_with_rectpct</a:t>
             </a:r>
           </a:p>
           <a:p>
             <a:r>
-              <a:rPr lang="en-US"/>
               <a:t>export-image-target: keyvisual</a:t>
             </a:r>
           </a:p>
           <a:p>
             <a:r>
-              <a:rPr lang="en-US"/>
               <a:t>export-image: extracted/figures/&lt;__BASEFILENAME__&gt;_keyvisual.png</a:t>
             </a:r>
           </a:p>
-          <a:p>
-            <a:endParaRPr/>
-          </a:p>
+          <a:p/>
           <a:p>
             <a:r>
               <a:t>===BLOCK===</a:t>
@@ -666,9 +651,7 @@
               <a:t>{{BLOCK:MD:LONG}}</a:t>
             </a:r>
           </a:p>
-          <a:p>
-            <a:endParaRPr/>
-          </a:p>
+          <a:p/>
           <a:p>
             <a:r>
               <a:t>export-note: extracted/&lt;__BASEFILENAME__&gt;_slide&lt;__SLIDENUM__&gt;_md.md</a:t>
@@ -684,106 +667,64 @@
               <a:t>## &lt;__TITLE__&gt;</a:t>
             </a:r>
           </a:p>
-          <a:p>
-            <a:endParaRPr/>
-          </a:p>
+          <a:p/>
           <a:p>
             <a:r>
               <a:t>結合pptx上でソースpptxを特定したい場合があります。その場合はソースpptxのファイル名やスライド番号、スライドタイトルに置換される特殊定数を使うことにより可能です。</a:t>
             </a:r>
           </a:p>
-          <a:p>
-            <a:endParaRPr/>
-          </a:p>
+          <a:p/>
           <a:p>
             <a:r>
               <a:t>スライド上および note の下記の記述（特殊定数）はそれぞれ該当する情報に置換されます。</a:t>
             </a:r>
           </a:p>
-          <a:p>
-            <a:endParaRPr/>
-          </a:p>
+          <a:p/>
           <a:p>
             <a:r>
               <a:t>この置換は変数定義とは無関係です。同一のテキスト文言を異なる意図で使わないようにご注意ください（強制置換されます）。</a:t>
             </a:r>
           </a:p>
-          <a:p>
-            <a:endParaRPr/>
-          </a:p>
-          <a:p>
-            <a:endParaRPr/>
-          </a:p>
-          <a:p>
-            <a:r>
-              <a:t>```{=latex}</a:t>
-            </a:r>
-          </a:p>
-          <a:p>
-            <a:r>
-              <a:t>\par\vspace{1\baselineskip}</a:t>
-            </a:r>
-          </a:p>
-          <a:p>
-            <a:r>
-              <a:t>\begin{center}</a:t>
-            </a:r>
-          </a:p>
-          <a:p>
-            <a:r>
-              <a:t>```</a:t>
-            </a:r>
-          </a:p>
-          <a:p>
-            <a:endParaRPr/>
-          </a:p>
+          <a:p/>
+          <a:p/>
+          <a:p>
+            <a:r>
+              <a:t>{{vspace:1}}</a:t>
+            </a:r>
+          </a:p>
+          <a:p/>
+          <a:p>
+            <a:r>
+              <a:t>::: {.center}</a:t>
+            </a:r>
+          </a:p>
+          <a:p/>
           <a:p>
             <a:r>
               <a:t>![](figures/&lt;__BASEFILENAME__&gt;_slide&lt;__SLIDENUM__&gt;_fig.png){ width=95% }</a:t>
             </a:r>
           </a:p>
-          <a:p>
-            <a:endParaRPr lang="en-US"/>
-          </a:p>
-          <a:p>
-            <a:r>
-              <a:rPr lang="en-US"/>
+          <a:p/>
+          <a:p>
+            <a:r>
               <a:t>![](figures/&lt;__BASEFILENAME__&gt;_keyvisual.png){ width=95% }</a:t>
             </a:r>
           </a:p>
-          <a:p>
-            <a:endParaRPr/>
-          </a:p>
-          <a:p>
-            <a:r>
-              <a:t>```{=latex}</a:t>
-            </a:r>
-          </a:p>
-          <a:p>
-            <a:r>
-              <a:t>\end{center}</a:t>
-            </a:r>
-          </a:p>
-          <a:p>
-            <a:r>
-              <a:t>\par\vspace{1\baselineskip}</a:t>
-            </a:r>
-          </a:p>
-          <a:p>
-            <a:r>
-              <a:t>```</a:t>
-            </a:r>
-            <a:endParaRPr lang="en-US"/>
-          </a:p>
-          <a:p>
-            <a:endParaRPr lang="en-US"/>
-          </a:p>
-          <a:p>
-            <a:endParaRPr lang="en-US"/>
-          </a:p>
-          <a:p>
-            <a:endParaRPr/>
-          </a:p>
+          <a:p/>
+          <a:p>
+            <a:r>
+              <a:t>:::</a:t>
+            </a:r>
+          </a:p>
+          <a:p/>
+          <a:p>
+            <a:r>
+              <a:t>{{vspace:1}}</a:t>
+            </a:r>
+          </a:p>
+          <a:p/>
+          <a:p/>
+          <a:p/>
         </p:txBody>
       </p:sp>
       <p:sp>
